--- a/Military-Pay-Estimator-Guide.pptx
+++ b/Military-Pay-Estimator-Guide.pptx
@@ -3819,7 +3819,7 @@
                 <a:ea typeface="Calibri" pitchFamily="34" charset="-122"/>
                 <a:cs typeface="Calibri" pitchFamily="34" charset="-120"/>
               </a:rPr>
-              <a:t>Defense Travel Management Office — 338 housing areas, every rank</a:t>
+              <a:t>Defense Travel Management Office — every housing area and rank, plus the official ZIP lookup</a:t>
             </a:r>
             <a:endParaRPr lang="en-US" sz="1200" dirty="0"/>
           </a:p>
@@ -12366,7 +12366,7 @@
                 <a:ea typeface="Cambria" pitchFamily="34" charset="-122"/>
                 <a:cs typeface="Cambria" pitchFamily="34" charset="-120"/>
               </a:rPr>
-              <a:t>Duty station</a:t>
+              <a:t>Duty station or ZIP</a:t>
             </a:r>
             <a:endParaRPr lang="en-US" sz="1400" dirty="0"/>
           </a:p>
@@ -12405,7 +12405,7 @@
                 <a:ea typeface="Calibri" pitchFamily="34" charset="-122"/>
                 <a:cs typeface="Calibri" pitchFamily="34" charset="-120"/>
               </a:rPr>
-              <a:t>338 real housing areas. Picking one fills in your housing allowance automatically.</a:t>
+              <a:t>Pick a station, or switch to ZIP — useful when home of record is away from the duty station. Either fills the housing allowance.</a:t>
             </a:r>
             <a:endParaRPr lang="en-US" sz="1150" dirty="0"/>
           </a:p>

--- a/Military-Pay-Estimator-Guide.pptx
+++ b/Military-Pay-Estimator-Guide.pptx
@@ -3819,7 +3819,7 @@
                 <a:ea typeface="Calibri" pitchFamily="34" charset="-122"/>
                 <a:cs typeface="Calibri" pitchFamily="34" charset="-120"/>
               </a:rPr>
-              <a:t>Defense Travel Management Office — every housing area and rank, plus the official ZIP lookup</a:t>
+              <a:t>Defense Travel Management Office — all areas, ranks, and the ZIP map</a:t>
             </a:r>
             <a:endParaRPr lang="en-US" sz="1200" dirty="0"/>
           </a:p>
@@ -6474,7 +6474,7 @@
                 <a:ea typeface="Calibri" pitchFamily="34" charset="-122"/>
                 <a:cs typeface="Calibri" pitchFamily="34" charset="-120"/>
               </a:rPr>
-              <a:t>No. Your pay details never leave your browser. The feedback form is separate and optional.</a:t>
+              <a:t>No. Pay details stay in your browser; the feedback form is separate.</a:t>
             </a:r>
             <a:endParaRPr lang="en-US" sz="1250" dirty="0"/>
           </a:p>
@@ -12405,7 +12405,7 @@
                 <a:ea typeface="Calibri" pitchFamily="34" charset="-122"/>
                 <a:cs typeface="Calibri" pitchFamily="34" charset="-120"/>
               </a:rPr>
-              <a:t>Pick a station, or switch to ZIP — useful when home of record is away from the duty station. Either fills the housing allowance.</a:t>
+              <a:t>Pick a station, or switch to ZIP if you live away from your duty station.</a:t>
             </a:r>
             <a:endParaRPr lang="en-US" sz="1150" dirty="0"/>
           </a:p>
